--- a/화면 설계서.pptx
+++ b/화면 설계서.pptx
@@ -116,7 +116,7 @@
 <p1510:revInfo xmlns:a="http://schemas.openxmlformats.org/drawingml/2006/main" xmlns:r="http://schemas.openxmlformats.org/officeDocument/2006/relationships" xmlns:p1510="http://schemas.microsoft.com/office/powerpoint/2015/10/main">
   <p1510:revLst>
     <p1510:client id="{1076A266-F073-4BEE-A498-70C49DF5B5BC}" v="238" dt="2026-03-13T04:49:59.069"/>
-    <p1510:client id="{463439AC-DE7E-4042-BD8E-4B3AD3CACCB5}" v="1901" dt="2026-03-13T08:06:35.265"/>
+    <p1510:client id="{463439AC-DE7E-4042-BD8E-4B3AD3CACCB5}" v="1983" dt="2026-03-13T08:11:26.845"/>
     <p1510:client id="{9A88B9CC-74D1-4A19-AE98-368250AE8D85}" v="1" dt="2026-03-13T01:09:57.030"/>
     <p1510:client id="{EF0DC70E-F6E4-47AD-AFC4-3FA60941A9A3}" v="9" dt="2026-03-13T01:09:32.152"/>
   </p1510:revLst>
@@ -3098,14 +3098,14 @@
           <p:nvPr>
             <p:extLst>
               <p:ext uri="{D42A27DB-BD31-4B8C-83A1-F6EECF244321}">
-                <p14:modId xmlns:p14="http://schemas.microsoft.com/office/powerpoint/2010/main" val="2977050088"/>
+                <p14:modId xmlns:p14="http://schemas.microsoft.com/office/powerpoint/2010/main" val="725834226"/>
               </p:ext>
             </p:extLst>
           </p:nvPr>
         </p:nvGraphicFramePr>
         <p:xfrm>
           <a:off x="9976338" y="902676"/>
-          <a:ext cx="2174094" cy="5348524"/>
+          <a:ext cx="2174094" cy="5498309"/>
         </p:xfrm>
         <a:graphic>
           <a:graphicData uri="http://schemas.openxmlformats.org/drawingml/2006/table">
@@ -3316,6 +3316,28 @@
                         <a:buNone/>
                       </a:pPr>
                       <a:r>
+                        <a:rPr lang="ko-KR" altLang="en-US" sz="800" b="0" i="0" u="none" strike="noStrike" noProof="0">
+                          <a:solidFill>
+                            <a:srgbClr val="000000"/>
+                          </a:solidFill>
+                          <a:latin typeface="Malgun Gothic"/>
+                          <a:ea typeface="Malgun Gothic"/>
+                        </a:rPr>
+                        <a:t>회원정보 수정 및 회원가입 버튼.</a:t>
+                      </a:r>
+                      <a:endParaRPr lang="ko-KR" altLang="en-US" sz="800" b="0" i="0" u="none" strike="noStrike" noProof="0" dirty="0">
+                        <a:solidFill>
+                          <a:srgbClr val="000000"/>
+                        </a:solidFill>
+                        <a:latin typeface="Malgun Gothic"/>
+                        <a:ea typeface="Malgun Gothic"/>
+                      </a:endParaRPr>
+                    </a:p>
+                    <a:p>
+                      <a:pPr lvl="0">
+                        <a:buNone/>
+                      </a:pPr>
+                      <a:r>
                         <a:rPr lang="ko-KR" sz="800" b="0" i="0" u="none" strike="noStrike" noProof="0">
                           <a:solidFill>
                             <a:srgbClr val="000000"/>
@@ -3323,7 +3345,27 @@
                           <a:latin typeface="Malgun Gothic"/>
                           <a:ea typeface="Malgun Gothic"/>
                         </a:rPr>
-                        <a:t>클릭 시 회원정보 수정 페이지로 이동</a:t>
+                        <a:t>클릭 시 회원정보 수정 페이지로 이동하거나</a:t>
+                      </a:r>
+                      <a:r>
+                        <a:rPr lang="en-US" altLang="ko-KR" sz="800" b="0" i="0" u="none" strike="noStrike" noProof="0">
+                          <a:solidFill>
+                            <a:srgbClr val="000000"/>
+                          </a:solidFill>
+                          <a:latin typeface="Malgun Gothic"/>
+                          <a:ea typeface="Malgun Gothic"/>
+                        </a:rPr>
+                        <a:t>,</a:t>
+                      </a:r>
+                      <a:r>
+                        <a:rPr lang="ko-KR" altLang="en-US" sz="800" b="0" i="0" u="none" strike="noStrike" noProof="0">
+                          <a:solidFill>
+                            <a:srgbClr val="000000"/>
+                          </a:solidFill>
+                          <a:latin typeface="Malgun Gothic"/>
+                          <a:ea typeface="Malgun Gothic"/>
+                        </a:rPr>
+                        <a:t> 회원가입 페이지로 이동.</a:t>
                       </a:r>
                       <a:endParaRPr lang="ko-KR"/>
                     </a:p>
@@ -3368,6 +3410,16 @@
                     <a:lstStyle/>
                     <a:p>
                       <a:pPr latinLnBrk="1"/>
+                      <a:r>
+                        <a:rPr lang="ko-KR" altLang="en-US" sz="800"/>
+                        <a:t>로그아웃 및 로그인 버튼.</a:t>
+                      </a:r>
+                      <a:endParaRPr lang="ko-KR" altLang="en-US" sz="800" dirty="0"/>
+                    </a:p>
+                    <a:p>
+                      <a:pPr lvl="0">
+                        <a:buNone/>
+                      </a:pPr>
                       <a:r>
                         <a:rPr lang="ko-KR" altLang="en-US" sz="800"/>
                         <a:t>클릭 시 로그아웃 후 로그인 버튼으로 </a:t>
